--- a/outputs/BIGB_그림_0823.pptx
+++ b/outputs/BIGB_그림_0823.pptx
@@ -3094,7 +3094,7 @@
     <p:bg>
       <p:bgPr>
         <a:solidFill>
-          <a:srgbClr val="FBFAF6"/>
+          <a:srgbClr val="FFFFFF"/>
         </a:solidFill>
         <a:effectLst/>
       </p:bgPr>
@@ -3285,7 +3285,7 @@
     <p:bg>
       <p:bgPr>
         <a:solidFill>
-          <a:srgbClr val="FBFAF6"/>
+          <a:srgbClr val="FFFFFF"/>
         </a:solidFill>
         <a:effectLst/>
       </p:bgPr>
@@ -3569,7 +3569,7 @@
     <p:bg>
       <p:bgPr>
         <a:solidFill>
-          <a:srgbClr val="FBFAF6"/>
+          <a:srgbClr val="FFFFFF"/>
         </a:solidFill>
         <a:effectLst/>
       </p:bgPr>
@@ -3920,7 +3920,7 @@
     <p:bg>
       <p:bgPr>
         <a:solidFill>
-          <a:srgbClr val="FBFAF6"/>
+          <a:srgbClr val="FFFFFF"/>
         </a:solidFill>
         <a:effectLst/>
       </p:bgPr>
@@ -4204,7 +4204,7 @@
     <p:bg>
       <p:bgPr>
         <a:solidFill>
-          <a:srgbClr val="FBFAF6"/>
+          <a:srgbClr val="FFFFFF"/>
         </a:solidFill>
         <a:effectLst/>
       </p:bgPr>
@@ -4488,7 +4488,7 @@
     <p:bg>
       <p:bgPr>
         <a:solidFill>
-          <a:srgbClr val="FBFAF6"/>
+          <a:srgbClr val="FFFFFF"/>
         </a:solidFill>
         <a:effectLst/>
       </p:bgPr>
@@ -4772,7 +4772,7 @@
     <p:bg>
       <p:bgPr>
         <a:solidFill>
-          <a:srgbClr val="FBFAF6"/>
+          <a:srgbClr val="FFFFFF"/>
         </a:solidFill>
         <a:effectLst/>
       </p:bgPr>
@@ -5056,7 +5056,7 @@
     <p:bg>
       <p:bgPr>
         <a:solidFill>
-          <a:srgbClr val="FBFAF6"/>
+          <a:srgbClr val="FFFFFF"/>
         </a:solidFill>
         <a:effectLst/>
       </p:bgPr>
@@ -5340,7 +5340,7 @@
     <p:bg>
       <p:bgPr>
         <a:solidFill>
-          <a:srgbClr val="FBFAF6"/>
+          <a:srgbClr val="FFFFFF"/>
         </a:solidFill>
         <a:effectLst/>
       </p:bgPr>
@@ -5624,7 +5624,7 @@
     <p:bg>
       <p:bgPr>
         <a:solidFill>
-          <a:srgbClr val="FBFAF6"/>
+          <a:srgbClr val="FFFFFF"/>
         </a:solidFill>
         <a:effectLst/>
       </p:bgPr>
@@ -5908,7 +5908,7 @@
     <p:bg>
       <p:bgPr>
         <a:solidFill>
-          <a:srgbClr val="FBFAF6"/>
+          <a:srgbClr val="FFFFFF"/>
         </a:solidFill>
         <a:effectLst/>
       </p:bgPr>

--- a/outputs/BIGB_그림_0823.pptx
+++ b/outputs/BIGB_그림_0823.pptx
@@ -3136,7 +3136,7 @@
             <a:r>
               <a:rPr sz="3400" b="1">
                 <a:solidFill>
-                  <a:srgbClr val="1C1A17"/>
+                  <a:srgbClr val="1A1A1A"/>
                 </a:solidFill>
                 <a:latin typeface="맑은 고딕"/>
               </a:rPr>
@@ -3175,7 +3175,7 @@
             <a:r>
               <a:rPr sz="1500" b="0">
                 <a:solidFill>
-                  <a:srgbClr val="77726A"/>
+                  <a:srgbClr val="6E6E6E"/>
                 </a:solidFill>
                 <a:latin typeface="맑은 고딕"/>
               </a:rPr>
@@ -3214,7 +3214,7 @@
             <a:r>
               <a:rPr sz="1250" b="0">
                 <a:solidFill>
-                  <a:srgbClr val="77726A"/>
+                  <a:srgbClr val="6E6E6E"/>
                 </a:solidFill>
                 <a:latin typeface="맑은 고딕"/>
               </a:rPr>
@@ -3230,7 +3230,7 @@
             <a:r>
               <a:rPr sz="1250" b="0">
                 <a:solidFill>
-                  <a:srgbClr val="77726A"/>
+                  <a:srgbClr val="6E6E6E"/>
                 </a:solidFill>
                 <a:latin typeface="맑은 고딕"/>
               </a:rPr>
@@ -3246,7 +3246,7 @@
             <a:r>
               <a:rPr sz="1250" b="0">
                 <a:solidFill>
-                  <a:srgbClr val="77726A"/>
+                  <a:srgbClr val="6E6E6E"/>
                 </a:solidFill>
                 <a:latin typeface="맑은 고딕"/>
               </a:rPr>
@@ -3262,7 +3262,7 @@
             <a:r>
               <a:rPr sz="1250" b="0">
                 <a:solidFill>
-                  <a:srgbClr val="77726A"/>
+                  <a:srgbClr val="6E6E6E"/>
                 </a:solidFill>
                 <a:latin typeface="맑은 고딕"/>
               </a:rPr>
@@ -3327,7 +3327,7 @@
             <a:r>
               <a:rPr sz="1300" b="1">
                 <a:solidFill>
-                  <a:srgbClr val="A33B29"/>
+                  <a:srgbClr val="1A1A1A"/>
                 </a:solidFill>
                 <a:latin typeface="맑은 고딕"/>
               </a:rPr>
@@ -3366,7 +3366,7 @@
             <a:r>
               <a:rPr sz="2200" b="1">
                 <a:solidFill>
-                  <a:srgbClr val="1C1A17"/>
+                  <a:srgbClr val="1A1A1A"/>
                 </a:solidFill>
                 <a:latin typeface="맑은 고딕"/>
               </a:rPr>
@@ -3405,7 +3405,7 @@
             <a:r>
               <a:rPr sz="1200" b="1">
                 <a:solidFill>
-                  <a:srgbClr val="77726A"/>
+                  <a:srgbClr val="6E6E6E"/>
                 </a:solidFill>
                 <a:latin typeface="맑은 고딕"/>
               </a:rPr>
@@ -3468,7 +3468,7 @@
             <a:r>
               <a:rPr sz="1300" b="1">
                 <a:solidFill>
-                  <a:srgbClr val="1C1A17"/>
+                  <a:srgbClr val="1A1A1A"/>
                 </a:solidFill>
                 <a:latin typeface="맑은 고딕"/>
               </a:rPr>
@@ -3507,7 +3507,7 @@
             <a:r>
               <a:rPr sz="1100" b="0">
                 <a:solidFill>
-                  <a:srgbClr val="77726A"/>
+                  <a:srgbClr val="6E6E6E"/>
                 </a:solidFill>
                 <a:latin typeface="맑은 고딕"/>
               </a:rPr>
@@ -3546,7 +3546,7 @@
             <a:r>
               <a:rPr sz="1000" b="0">
                 <a:solidFill>
-                  <a:srgbClr val="A33B29"/>
+                  <a:srgbClr val="1A1A1A"/>
                 </a:solidFill>
                 <a:latin typeface="맑은 고딕"/>
               </a:rPr>
@@ -3611,7 +3611,7 @@
             <a:r>
               <a:rPr sz="2400" b="1">
                 <a:solidFill>
-                  <a:srgbClr val="1C1A17"/>
+                  <a:srgbClr val="1A1A1A"/>
                 </a:solidFill>
                 <a:latin typeface="맑은 고딕"/>
               </a:rPr>
@@ -3650,7 +3650,7 @@
             <a:r>
               <a:rPr sz="1250" b="0">
                 <a:solidFill>
-                  <a:srgbClr val="77726A"/>
+                  <a:srgbClr val="6E6E6E"/>
                 </a:solidFill>
                 <a:latin typeface="맑은 고딕"/>
               </a:rPr>
@@ -3666,7 +3666,7 @@
             <a:r>
               <a:rPr sz="1250" b="0">
                 <a:solidFill>
-                  <a:srgbClr val="77726A"/>
+                  <a:srgbClr val="6E6E6E"/>
                 </a:solidFill>
                 <a:latin typeface="맑은 고딕"/>
               </a:rPr>
@@ -3682,7 +3682,7 @@
             <a:r>
               <a:rPr sz="1250" b="0">
                 <a:solidFill>
-                  <a:srgbClr val="77726A"/>
+                  <a:srgbClr val="6E6E6E"/>
                 </a:solidFill>
                 <a:latin typeface="맑은 고딕"/>
               </a:rPr>
@@ -3698,7 +3698,7 @@
             <a:r>
               <a:rPr sz="1250" b="0">
                 <a:solidFill>
-                  <a:srgbClr val="77726A"/>
+                  <a:srgbClr val="6E6E6E"/>
                 </a:solidFill>
                 <a:latin typeface="맑은 고딕"/>
               </a:rPr>
@@ -3714,7 +3714,7 @@
             <a:r>
               <a:rPr sz="1250" b="0">
                 <a:solidFill>
-                  <a:srgbClr val="77726A"/>
+                  <a:srgbClr val="6E6E6E"/>
                 </a:solidFill>
                 <a:latin typeface="맑은 고딕"/>
               </a:rPr>
@@ -3730,7 +3730,7 @@
             <a:r>
               <a:rPr sz="1250" b="0">
                 <a:solidFill>
-                  <a:srgbClr val="77726A"/>
+                  <a:srgbClr val="6E6E6E"/>
                 </a:solidFill>
                 <a:latin typeface="맑은 고딕"/>
               </a:rPr>
@@ -3746,7 +3746,7 @@
             <a:r>
               <a:rPr sz="1250" b="0">
                 <a:solidFill>
-                  <a:srgbClr val="77726A"/>
+                  <a:srgbClr val="6E6E6E"/>
                 </a:solidFill>
                 <a:latin typeface="맑은 고딕"/>
               </a:rPr>
@@ -3785,7 +3785,7 @@
             <a:r>
               <a:rPr sz="1250" b="0">
                 <a:solidFill>
-                  <a:srgbClr val="77726A"/>
+                  <a:srgbClr val="6E6E6E"/>
                 </a:solidFill>
                 <a:latin typeface="맑은 고딕"/>
               </a:rPr>
@@ -3801,7 +3801,7 @@
             <a:r>
               <a:rPr sz="1250" b="0">
                 <a:solidFill>
-                  <a:srgbClr val="77726A"/>
+                  <a:srgbClr val="6E6E6E"/>
                 </a:solidFill>
                 <a:latin typeface="맑은 고딕"/>
               </a:rPr>
@@ -3817,7 +3817,7 @@
             <a:r>
               <a:rPr sz="1250" b="0">
                 <a:solidFill>
-                  <a:srgbClr val="77726A"/>
+                  <a:srgbClr val="6E6E6E"/>
                 </a:solidFill>
                 <a:latin typeface="맑은 고딕"/>
               </a:rPr>
@@ -3833,7 +3833,7 @@
             <a:r>
               <a:rPr sz="1250" b="0">
                 <a:solidFill>
-                  <a:srgbClr val="77726A"/>
+                  <a:srgbClr val="6E6E6E"/>
                 </a:solidFill>
                 <a:latin typeface="맑은 고딕"/>
               </a:rPr>
@@ -3849,7 +3849,7 @@
             <a:r>
               <a:rPr sz="1250" b="0">
                 <a:solidFill>
-                  <a:srgbClr val="77726A"/>
+                  <a:srgbClr val="6E6E6E"/>
                 </a:solidFill>
                 <a:latin typeface="맑은 고딕"/>
               </a:rPr>
@@ -3865,7 +3865,7 @@
             <a:r>
               <a:rPr sz="1250" b="0">
                 <a:solidFill>
-                  <a:srgbClr val="77726A"/>
+                  <a:srgbClr val="6E6E6E"/>
                 </a:solidFill>
                 <a:latin typeface="맑은 고딕"/>
               </a:rPr>
@@ -3881,7 +3881,7 @@
             <a:r>
               <a:rPr sz="1250" b="0">
                 <a:solidFill>
-                  <a:srgbClr val="77726A"/>
+                  <a:srgbClr val="6E6E6E"/>
                 </a:solidFill>
                 <a:latin typeface="맑은 고딕"/>
               </a:rPr>
@@ -3897,7 +3897,7 @@
             <a:r>
               <a:rPr sz="1250" b="0">
                 <a:solidFill>
-                  <a:srgbClr val="77726A"/>
+                  <a:srgbClr val="6E6E6E"/>
                 </a:solidFill>
                 <a:latin typeface="맑은 고딕"/>
               </a:rPr>
@@ -3962,7 +3962,7 @@
             <a:r>
               <a:rPr sz="1300" b="1">
                 <a:solidFill>
-                  <a:srgbClr val="A33B29"/>
+                  <a:srgbClr val="1A1A1A"/>
                 </a:solidFill>
                 <a:latin typeface="맑은 고딕"/>
               </a:rPr>
@@ -4001,7 +4001,7 @@
             <a:r>
               <a:rPr sz="2200" b="1">
                 <a:solidFill>
-                  <a:srgbClr val="1C1A17"/>
+                  <a:srgbClr val="1A1A1A"/>
                 </a:solidFill>
                 <a:latin typeface="맑은 고딕"/>
               </a:rPr>
@@ -4040,7 +4040,7 @@
             <a:r>
               <a:rPr sz="1200" b="1">
                 <a:solidFill>
-                  <a:srgbClr val="77726A"/>
+                  <a:srgbClr val="6E6E6E"/>
                 </a:solidFill>
                 <a:latin typeface="맑은 고딕"/>
               </a:rPr>
@@ -4103,7 +4103,7 @@
             <a:r>
               <a:rPr sz="1300" b="1">
                 <a:solidFill>
-                  <a:srgbClr val="1C1A17"/>
+                  <a:srgbClr val="1A1A1A"/>
                 </a:solidFill>
                 <a:latin typeface="맑은 고딕"/>
               </a:rPr>
@@ -4142,7 +4142,7 @@
             <a:r>
               <a:rPr sz="1100" b="0">
                 <a:solidFill>
-                  <a:srgbClr val="77726A"/>
+                  <a:srgbClr val="6E6E6E"/>
                 </a:solidFill>
                 <a:latin typeface="맑은 고딕"/>
               </a:rPr>
@@ -4181,7 +4181,7 @@
             <a:r>
               <a:rPr sz="1000" b="0">
                 <a:solidFill>
-                  <a:srgbClr val="A33B29"/>
+                  <a:srgbClr val="1A1A1A"/>
                 </a:solidFill>
                 <a:latin typeface="맑은 고딕"/>
               </a:rPr>
@@ -4246,7 +4246,7 @@
             <a:r>
               <a:rPr sz="1300" b="1">
                 <a:solidFill>
-                  <a:srgbClr val="A33B29"/>
+                  <a:srgbClr val="1A1A1A"/>
                 </a:solidFill>
                 <a:latin typeface="맑은 고딕"/>
               </a:rPr>
@@ -4285,7 +4285,7 @@
             <a:r>
               <a:rPr sz="2200" b="1">
                 <a:solidFill>
-                  <a:srgbClr val="1C1A17"/>
+                  <a:srgbClr val="1A1A1A"/>
                 </a:solidFill>
                 <a:latin typeface="맑은 고딕"/>
               </a:rPr>
@@ -4324,7 +4324,7 @@
             <a:r>
               <a:rPr sz="1200" b="1">
                 <a:solidFill>
-                  <a:srgbClr val="77726A"/>
+                  <a:srgbClr val="6E6E6E"/>
                 </a:solidFill>
                 <a:latin typeface="맑은 고딕"/>
               </a:rPr>
@@ -4387,7 +4387,7 @@
             <a:r>
               <a:rPr sz="1300" b="1">
                 <a:solidFill>
-                  <a:srgbClr val="1C1A17"/>
+                  <a:srgbClr val="1A1A1A"/>
                 </a:solidFill>
                 <a:latin typeface="맑은 고딕"/>
               </a:rPr>
@@ -4426,7 +4426,7 @@
             <a:r>
               <a:rPr sz="1100" b="0">
                 <a:solidFill>
-                  <a:srgbClr val="77726A"/>
+                  <a:srgbClr val="6E6E6E"/>
                 </a:solidFill>
                 <a:latin typeface="맑은 고딕"/>
               </a:rPr>
@@ -4465,7 +4465,7 @@
             <a:r>
               <a:rPr sz="1000" b="0">
                 <a:solidFill>
-                  <a:srgbClr val="A33B29"/>
+                  <a:srgbClr val="1A1A1A"/>
                 </a:solidFill>
                 <a:latin typeface="맑은 고딕"/>
               </a:rPr>
@@ -4530,7 +4530,7 @@
             <a:r>
               <a:rPr sz="1300" b="1">
                 <a:solidFill>
-                  <a:srgbClr val="A33B29"/>
+                  <a:srgbClr val="1A1A1A"/>
                 </a:solidFill>
                 <a:latin typeface="맑은 고딕"/>
               </a:rPr>
@@ -4569,7 +4569,7 @@
             <a:r>
               <a:rPr sz="2200" b="1">
                 <a:solidFill>
-                  <a:srgbClr val="1C1A17"/>
+                  <a:srgbClr val="1A1A1A"/>
                 </a:solidFill>
                 <a:latin typeface="맑은 고딕"/>
               </a:rPr>
@@ -4608,7 +4608,7 @@
             <a:r>
               <a:rPr sz="1200" b="1">
                 <a:solidFill>
-                  <a:srgbClr val="77726A"/>
+                  <a:srgbClr val="6E6E6E"/>
                 </a:solidFill>
                 <a:latin typeface="맑은 고딕"/>
               </a:rPr>
@@ -4671,7 +4671,7 @@
             <a:r>
               <a:rPr sz="1300" b="1">
                 <a:solidFill>
-                  <a:srgbClr val="1C1A17"/>
+                  <a:srgbClr val="1A1A1A"/>
                 </a:solidFill>
                 <a:latin typeface="맑은 고딕"/>
               </a:rPr>
@@ -4710,7 +4710,7 @@
             <a:r>
               <a:rPr sz="1100" b="0">
                 <a:solidFill>
-                  <a:srgbClr val="77726A"/>
+                  <a:srgbClr val="6E6E6E"/>
                 </a:solidFill>
                 <a:latin typeface="맑은 고딕"/>
               </a:rPr>
@@ -4749,7 +4749,7 @@
             <a:r>
               <a:rPr sz="1000" b="0">
                 <a:solidFill>
-                  <a:srgbClr val="A33B29"/>
+                  <a:srgbClr val="1A1A1A"/>
                 </a:solidFill>
                 <a:latin typeface="맑은 고딕"/>
               </a:rPr>
@@ -4814,7 +4814,7 @@
             <a:r>
               <a:rPr sz="1300" b="1">
                 <a:solidFill>
-                  <a:srgbClr val="A33B29"/>
+                  <a:srgbClr val="1A1A1A"/>
                 </a:solidFill>
                 <a:latin typeface="맑은 고딕"/>
               </a:rPr>
@@ -4832,7 +4832,7 @@
         <p:spPr>
           <a:xfrm>
             <a:off x="576000" y="612000"/>
-            <a:ext cx="10800000" cy="503999"/>
+            <a:ext cx="7560000" cy="503999"/>
           </a:xfrm>
           <a:prstGeom prst="rect">
             <a:avLst/>
@@ -4853,7 +4853,7 @@
             <a:r>
               <a:rPr sz="2200" b="1">
                 <a:solidFill>
-                  <a:srgbClr val="1C1A17"/>
+                  <a:srgbClr val="1A1A1A"/>
                 </a:solidFill>
                 <a:latin typeface="맑은 고딕"/>
               </a:rPr>
@@ -4892,49 +4892,25 @@
             <a:r>
               <a:rPr sz="1200" b="1">
                 <a:solidFill>
-                  <a:srgbClr val="77726A"/>
-                </a:solidFill>
-                <a:latin typeface="맑은 고딕"/>
-              </a:rPr>
-              <a:t>§3 개선방안 / §5 적용성</a:t>
-            </a:r>
-          </a:p>
-        </p:txBody>
-      </p:sp>
-      <p:pic>
-        <p:nvPicPr>
-          <p:cNvPr id="5" name="Picture 4" descr="fig_pipeline.png"/>
-          <p:cNvPicPr>
-            <a:picLocks noChangeAspect="1"/>
-          </p:cNvPicPr>
-          <p:nvPr/>
-        </p:nvPicPr>
-        <p:blipFill>
-          <a:blip r:embed="rId2"/>
-          <a:stretch>
-            <a:fillRect/>
-          </a:stretch>
-        </p:blipFill>
-        <p:spPr>
-          <a:xfrm>
-            <a:off x="588600" y="1620947"/>
-            <a:ext cx="11016000" cy="3382105"/>
-          </a:xfrm>
-          <a:prstGeom prst="rect">
-            <a:avLst/>
-          </a:prstGeom>
-        </p:spPr>
-      </p:pic>
-      <p:sp>
-        <p:nvSpPr>
-          <p:cNvPr id="6" name="TextBox 5"/>
+                  <a:srgbClr val="6E6E6E"/>
+                </a:solidFill>
+                <a:latin typeface="맑은 고딕"/>
+              </a:rPr>
+              <a:t>§3 개선방안</a:t>
+            </a:r>
+          </a:p>
+        </p:txBody>
+      </p:sp>
+      <p:sp>
+        <p:nvSpPr>
+          <p:cNvPr id="5" name="TextBox 4"/>
           <p:cNvSpPr txBox="1"/>
           <p:nvPr/>
         </p:nvSpPr>
         <p:spPr>
           <a:xfrm>
-            <a:off x="576000" y="5472000"/>
-            <a:ext cx="11016000" cy="503999"/>
+            <a:off x="8712000" y="756000"/>
+            <a:ext cx="3024000" cy="360000"/>
           </a:xfrm>
           <a:prstGeom prst="rect">
             <a:avLst/>
@@ -4947,33 +4923,430 @@
           </a:bodyPr>
           <a:lstStyle/>
           <a:p>
-            <a:pPr algn="l">
-              <a:spcAft>
-                <a:spcPts val="600"/>
-              </a:spcAft>
-            </a:pPr>
-            <a:r>
-              <a:rPr sz="1300" b="1">
-                <a:solidFill>
-                  <a:srgbClr val="1C1A17"/>
-                </a:solidFill>
-                <a:latin typeface="맑은 고딕"/>
-              </a:rPr>
-              <a:t>그림 4. 처리 흐름. 입력은 네 개의 계약 파일이며 실제 도면·계획서를 그 형식으로 넣으면 그대로 돈다.</a:t>
-            </a:r>
-          </a:p>
-        </p:txBody>
-      </p:sp>
-      <p:sp>
-        <p:nvSpPr>
-          <p:cNvPr id="7" name="TextBox 6"/>
+            <a:pPr algn="r">
+              <a:spcAft>
+                <a:spcPts val="600"/>
+              </a:spcAft>
+            </a:pPr>
+            <a:r>
+              <a:rPr sz="1000" b="0">
+                <a:solidFill>
+                  <a:srgbClr val="1A1A1A"/>
+                </a:solidFill>
+                <a:latin typeface="맑은 고딕"/>
+              </a:rPr>
+              <a:t>이 장은 도형이라 PPT 에서 편집됩니다</a:t>
+            </a:r>
+          </a:p>
+        </p:txBody>
+      </p:sp>
+      <p:sp>
+        <p:nvSpPr>
+          <p:cNvPr id="6" name="Rounded Rectangle 5"/>
+          <p:cNvSpPr/>
+          <p:nvPr/>
+        </p:nvSpPr>
+        <p:spPr>
+          <a:xfrm>
+            <a:off x="588600" y="1548000"/>
+            <a:ext cx="2484000" cy="792000"/>
+          </a:xfrm>
+          <a:prstGeom prst="roundRect">
+            <a:avLst>
+              <a:gd name="adj" fmla="val 9000"/>
+            </a:avLst>
+          </a:prstGeom>
+          <a:solidFill>
+            <a:srgbClr val="FFFFFF"/>
+          </a:solidFill>
+          <a:ln w="12700">
+            <a:solidFill>
+              <a:srgbClr val="C9C9C9"/>
+            </a:solidFill>
+          </a:ln>
+          <a:effectLst/>
+        </p:spPr>
+        <p:style>
+          <a:lnRef idx="1">
+            <a:schemeClr val="accent1"/>
+          </a:lnRef>
+          <a:fillRef idx="3">
+            <a:schemeClr val="accent1"/>
+          </a:fillRef>
+          <a:effectRef idx="2">
+            <a:schemeClr val="accent1"/>
+          </a:effectRef>
+          <a:fontRef idx="minor">
+            <a:schemeClr val="lt1"/>
+          </a:fontRef>
+        </p:style>
+        <p:txBody>
+          <a:bodyPr rtlCol="0" anchor="ctr" wrap="square" lIns="54000" rIns="54000" tIns="36000" bIns="36000"/>
+          <a:lstStyle/>
+          <a:p>
+            <a:pPr algn="ctr"/>
+            <a:r>
+              <a:rPr sz="1250" b="1">
+                <a:solidFill>
+                  <a:srgbClr val="1A1A1A"/>
+                </a:solidFill>
+                <a:latin typeface="맑은 고딕"/>
+              </a:rPr>
+              <a:t>CCTV 계획서</a:t>
+            </a:r>
+          </a:p>
+          <a:p>
+            <a:pPr algn="ctr">
+              <a:spcBef>
+                <a:spcPts val="200"/>
+              </a:spcBef>
+            </a:pPr>
+            <a:r>
+              <a:rPr sz="950">
+                <a:solidFill>
+                  <a:srgbClr val="6E6E6E"/>
+                </a:solidFill>
+                <a:latin typeface="맑은 고딕"/>
+              </a:rPr>
+              <a:t>위치·높이·방위·화각</a:t>
+            </a:r>
+          </a:p>
+        </p:txBody>
+      </p:sp>
+      <p:sp>
+        <p:nvSpPr>
+          <p:cNvPr id="7" name="Rounded Rectangle 6"/>
+          <p:cNvSpPr/>
+          <p:nvPr/>
+        </p:nvSpPr>
+        <p:spPr>
+          <a:xfrm>
+            <a:off x="3432600" y="1548000"/>
+            <a:ext cx="2484000" cy="792000"/>
+          </a:xfrm>
+          <a:prstGeom prst="roundRect">
+            <a:avLst>
+              <a:gd name="adj" fmla="val 9000"/>
+            </a:avLst>
+          </a:prstGeom>
+          <a:solidFill>
+            <a:srgbClr val="FFFFFF"/>
+          </a:solidFill>
+          <a:ln w="12700">
+            <a:solidFill>
+              <a:srgbClr val="C9C9C9"/>
+            </a:solidFill>
+          </a:ln>
+          <a:effectLst/>
+        </p:spPr>
+        <p:style>
+          <a:lnRef idx="1">
+            <a:schemeClr val="accent1"/>
+          </a:lnRef>
+          <a:fillRef idx="3">
+            <a:schemeClr val="accent1"/>
+          </a:fillRef>
+          <a:effectRef idx="2">
+            <a:schemeClr val="accent1"/>
+          </a:effectRef>
+          <a:fontRef idx="minor">
+            <a:schemeClr val="lt1"/>
+          </a:fontRef>
+        </p:style>
+        <p:txBody>
+          <a:bodyPr rtlCol="0" anchor="ctr" wrap="square" lIns="54000" rIns="54000" tIns="36000" bIns="36000"/>
+          <a:lstStyle/>
+          <a:p>
+            <a:pPr algn="ctr"/>
+            <a:r>
+              <a:rPr sz="1250" b="1">
+                <a:solidFill>
+                  <a:srgbClr val="1A1A1A"/>
+                </a:solidFill>
+                <a:latin typeface="맑은 고딕"/>
+              </a:rPr>
+              <a:t>골조 형상</a:t>
+            </a:r>
+          </a:p>
+          <a:p>
+            <a:pPr algn="ctr">
+              <a:spcBef>
+                <a:spcPts val="200"/>
+              </a:spcBef>
+            </a:pPr>
+            <a:r>
+              <a:rPr sz="950">
+                <a:solidFill>
+                  <a:srgbClr val="6E6E6E"/>
+                </a:solidFill>
+                <a:latin typeface="맑은 고딕"/>
+              </a:rPr>
+              <a:t>도면·BIM·실측</a:t>
+            </a:r>
+          </a:p>
+        </p:txBody>
+      </p:sp>
+      <p:sp>
+        <p:nvSpPr>
+          <p:cNvPr id="8" name="Rounded Rectangle 7"/>
+          <p:cNvSpPr/>
+          <p:nvPr/>
+        </p:nvSpPr>
+        <p:spPr>
+          <a:xfrm>
+            <a:off x="6276600" y="1548000"/>
+            <a:ext cx="2484000" cy="792000"/>
+          </a:xfrm>
+          <a:prstGeom prst="roundRect">
+            <a:avLst>
+              <a:gd name="adj" fmla="val 9000"/>
+            </a:avLst>
+          </a:prstGeom>
+          <a:solidFill>
+            <a:srgbClr val="FFFFFF"/>
+          </a:solidFill>
+          <a:ln w="12700">
+            <a:solidFill>
+              <a:srgbClr val="C9C9C9"/>
+            </a:solidFill>
+          </a:ln>
+          <a:effectLst/>
+        </p:spPr>
+        <p:style>
+          <a:lnRef idx="1">
+            <a:schemeClr val="accent1"/>
+          </a:lnRef>
+          <a:fillRef idx="3">
+            <a:schemeClr val="accent1"/>
+          </a:fillRef>
+          <a:effectRef idx="2">
+            <a:schemeClr val="accent1"/>
+          </a:effectRef>
+          <a:fontRef idx="minor">
+            <a:schemeClr val="lt1"/>
+          </a:fontRef>
+        </p:style>
+        <p:txBody>
+          <a:bodyPr rtlCol="0" anchor="ctr" wrap="square" lIns="54000" rIns="54000" tIns="36000" bIns="36000"/>
+          <a:lstStyle/>
+          <a:p>
+            <a:pPr algn="ctr"/>
+            <a:r>
+              <a:rPr sz="1250" b="1">
+                <a:solidFill>
+                  <a:srgbClr val="1A1A1A"/>
+                </a:solidFill>
+                <a:latin typeface="맑은 고딕"/>
+              </a:rPr>
+              <a:t>위험구역</a:t>
+            </a:r>
+          </a:p>
+          <a:p>
+            <a:pPr algn="ctr">
+              <a:spcBef>
+                <a:spcPts val="200"/>
+              </a:spcBef>
+            </a:pPr>
+            <a:r>
+              <a:rPr sz="950">
+                <a:solidFill>
+                  <a:srgbClr val="6E6E6E"/>
+                </a:solidFill>
+                <a:latin typeface="맑은 고딕"/>
+              </a:rPr>
+              <a:t>안전관리계획서</a:t>
+            </a:r>
+          </a:p>
+        </p:txBody>
+      </p:sp>
+      <p:sp>
+        <p:nvSpPr>
+          <p:cNvPr id="9" name="Rounded Rectangle 8"/>
+          <p:cNvSpPr/>
+          <p:nvPr/>
+        </p:nvSpPr>
+        <p:spPr>
+          <a:xfrm>
+            <a:off x="9120600" y="1548000"/>
+            <a:ext cx="2484000" cy="792000"/>
+          </a:xfrm>
+          <a:prstGeom prst="roundRect">
+            <a:avLst>
+              <a:gd name="adj" fmla="val 9000"/>
+            </a:avLst>
+          </a:prstGeom>
+          <a:solidFill>
+            <a:srgbClr val="FFFFFF"/>
+          </a:solidFill>
+          <a:ln w="12700">
+            <a:solidFill>
+              <a:srgbClr val="C9C9C9"/>
+            </a:solidFill>
+          </a:ln>
+          <a:effectLst/>
+        </p:spPr>
+        <p:style>
+          <a:lnRef idx="1">
+            <a:schemeClr val="accent1"/>
+          </a:lnRef>
+          <a:fillRef idx="3">
+            <a:schemeClr val="accent1"/>
+          </a:fillRef>
+          <a:effectRef idx="2">
+            <a:schemeClr val="accent1"/>
+          </a:effectRef>
+          <a:fontRef idx="minor">
+            <a:schemeClr val="lt1"/>
+          </a:fontRef>
+        </p:style>
+        <p:txBody>
+          <a:bodyPr rtlCol="0" anchor="ctr" wrap="square" lIns="54000" rIns="54000" tIns="36000" bIns="36000"/>
+          <a:lstStyle/>
+          <a:p>
+            <a:pPr algn="ctr"/>
+            <a:r>
+              <a:rPr sz="1250" b="1">
+                <a:solidFill>
+                  <a:srgbClr val="1A1A1A"/>
+                </a:solidFill>
+                <a:latin typeface="맑은 고딕"/>
+              </a:rPr>
+              <a:t>공정표</a:t>
+            </a:r>
+          </a:p>
+          <a:p>
+            <a:pPr algn="ctr">
+              <a:spcBef>
+                <a:spcPts val="200"/>
+              </a:spcBef>
+            </a:pPr>
+            <a:r>
+              <a:rPr sz="950">
+                <a:solidFill>
+                  <a:srgbClr val="6E6E6E"/>
+                </a:solidFill>
+                <a:latin typeface="맑은 고딕"/>
+              </a:rPr>
+              <a:t>시간대별 작업</a:t>
+            </a:r>
+          </a:p>
+        </p:txBody>
+      </p:sp>
+      <p:cxnSp>
+        <p:nvCxnSpPr>
+          <p:cNvPr id="10" name="Connector 9"/>
+          <p:cNvCxnSpPr/>
+          <p:nvPr/>
+        </p:nvCxnSpPr>
+        <p:spPr>
+          <a:xfrm>
+            <a:off x="588600" y="2538000"/>
+            <a:ext cx="11016000" cy="0"/>
+          </a:xfrm>
+          <a:prstGeom prst="line">
+            <a:avLst/>
+          </a:prstGeom>
+          <a:ln w="12700">
+            <a:solidFill>
+              <a:srgbClr val="C9C9C9"/>
+            </a:solidFill>
+          </a:ln>
+        </p:spPr>
+        <p:style>
+          <a:lnRef idx="2">
+            <a:schemeClr val="accent1"/>
+          </a:lnRef>
+          <a:fillRef idx="0">
+            <a:schemeClr val="accent1"/>
+          </a:fillRef>
+          <a:effectRef idx="1">
+            <a:schemeClr val="accent1"/>
+          </a:effectRef>
+          <a:fontRef idx="minor">
+            <a:schemeClr val="tx1"/>
+          </a:fontRef>
+        </p:style>
+      </p:cxnSp>
+      <p:cxnSp>
+        <p:nvCxnSpPr>
+          <p:cNvPr id="11" name="Connector 10"/>
+          <p:cNvCxnSpPr/>
+          <p:nvPr/>
+        </p:nvCxnSpPr>
+        <p:spPr>
+          <a:xfrm>
+            <a:off x="588600" y="2437200"/>
+            <a:ext cx="0" cy="100800"/>
+          </a:xfrm>
+          <a:prstGeom prst="line">
+            <a:avLst/>
+          </a:prstGeom>
+          <a:ln w="12700">
+            <a:solidFill>
+              <a:srgbClr val="C9C9C9"/>
+            </a:solidFill>
+          </a:ln>
+        </p:spPr>
+        <p:style>
+          <a:lnRef idx="2">
+            <a:schemeClr val="accent1"/>
+          </a:lnRef>
+          <a:fillRef idx="0">
+            <a:schemeClr val="accent1"/>
+          </a:fillRef>
+          <a:effectRef idx="1">
+            <a:schemeClr val="accent1"/>
+          </a:effectRef>
+          <a:fontRef idx="minor">
+            <a:schemeClr val="tx1"/>
+          </a:fontRef>
+        </p:style>
+      </p:cxnSp>
+      <p:cxnSp>
+        <p:nvCxnSpPr>
+          <p:cNvPr id="12" name="Connector 11"/>
+          <p:cNvCxnSpPr/>
+          <p:nvPr/>
+        </p:nvCxnSpPr>
+        <p:spPr>
+          <a:xfrm>
+            <a:off x="11604600" y="2437200"/>
+            <a:ext cx="0" cy="100800"/>
+          </a:xfrm>
+          <a:prstGeom prst="line">
+            <a:avLst/>
+          </a:prstGeom>
+          <a:ln w="12700">
+            <a:solidFill>
+              <a:srgbClr val="C9C9C9"/>
+            </a:solidFill>
+          </a:ln>
+        </p:spPr>
+        <p:style>
+          <a:lnRef idx="2">
+            <a:schemeClr val="accent1"/>
+          </a:lnRef>
+          <a:fillRef idx="0">
+            <a:schemeClr val="accent1"/>
+          </a:fillRef>
+          <a:effectRef idx="1">
+            <a:schemeClr val="accent1"/>
+          </a:effectRef>
+          <a:fontRef idx="minor">
+            <a:schemeClr val="tx1"/>
+          </a:fontRef>
+        </p:style>
+      </p:cxnSp>
+      <p:sp>
+        <p:nvSpPr>
+          <p:cNvPr id="13" name="TextBox 12"/>
           <p:cNvSpPr txBox="1"/>
           <p:nvPr/>
         </p:nvSpPr>
         <p:spPr>
           <a:xfrm>
-            <a:off x="576000" y="5903999"/>
-            <a:ext cx="11016000" cy="648000"/>
+            <a:off x="588600" y="2574000"/>
+            <a:ext cx="3600000" cy="288000"/>
           </a:xfrm>
           <a:prstGeom prst="rect">
             <a:avLst/>
@@ -4992,26 +5365,571 @@
               </a:spcAft>
             </a:pPr>
             <a:r>
-              <a:rPr sz="1100" b="0">
-                <a:solidFill>
-                  <a:srgbClr val="77726A"/>
-                </a:solidFill>
-                <a:latin typeface="맑은 고딕"/>
-              </a:rPr>
-              <a:t>"이게 실제로 돌아가는 물건인가"에 답하는 그림. 입력이 현장에서 이미 쓰는 서류라는 점이 적용성 근거가 된다.</a:t>
-            </a:r>
-          </a:p>
-        </p:txBody>
-      </p:sp>
-      <p:sp>
-        <p:nvSpPr>
-          <p:cNvPr id="8" name="TextBox 7"/>
+              <a:rPr sz="1050" b="0">
+                <a:solidFill>
+                  <a:srgbClr val="6E6E6E"/>
+                </a:solidFill>
+                <a:latin typeface="맑은 고딕"/>
+              </a:rPr>
+              <a:t>입력 ― 네 개의 계약 파일</a:t>
+            </a:r>
+          </a:p>
+        </p:txBody>
+      </p:sp>
+      <p:sp>
+        <p:nvSpPr>
+          <p:cNvPr id="14" name="Rounded Rectangle 13"/>
+          <p:cNvSpPr/>
+          <p:nvPr/>
+        </p:nvSpPr>
+        <p:spPr>
+          <a:xfrm>
+            <a:off x="426600" y="4031999"/>
+            <a:ext cx="1980000" cy="827999"/>
+          </a:xfrm>
+          <a:prstGeom prst="roundRect">
+            <a:avLst>
+              <a:gd name="adj" fmla="val 9000"/>
+            </a:avLst>
+          </a:prstGeom>
+          <a:solidFill>
+            <a:srgbClr val="FFFFFF"/>
+          </a:solidFill>
+          <a:ln w="12700">
+            <a:solidFill>
+              <a:srgbClr val="C9C9C9"/>
+            </a:solidFill>
+          </a:ln>
+          <a:effectLst/>
+        </p:spPr>
+        <p:style>
+          <a:lnRef idx="1">
+            <a:schemeClr val="accent1"/>
+          </a:lnRef>
+          <a:fillRef idx="3">
+            <a:schemeClr val="accent1"/>
+          </a:fillRef>
+          <a:effectRef idx="2">
+            <a:schemeClr val="accent1"/>
+          </a:effectRef>
+          <a:fontRef idx="minor">
+            <a:schemeClr val="lt1"/>
+          </a:fontRef>
+        </p:style>
+        <p:txBody>
+          <a:bodyPr rtlCol="0" anchor="ctr" wrap="square" lIns="54000" rIns="54000" tIns="36000" bIns="36000"/>
+          <a:lstStyle/>
+          <a:p>
+            <a:pPr algn="ctr"/>
+            <a:r>
+              <a:rPr sz="1150" b="1">
+                <a:solidFill>
+                  <a:srgbClr val="1A1A1A"/>
+                </a:solidFill>
+                <a:latin typeface="맑은 고딕"/>
+              </a:rPr>
+              <a:t>복셀화 + 광선투사</a:t>
+            </a:r>
+          </a:p>
+          <a:p>
+            <a:pPr algn="ctr">
+              <a:spcBef>
+                <a:spcPts val="200"/>
+              </a:spcBef>
+            </a:pPr>
+            <a:r>
+              <a:rPr sz="950">
+                <a:solidFill>
+                  <a:srgbClr val="6E6E6E"/>
+                </a:solidFill>
+                <a:latin typeface="맑은 고딕"/>
+              </a:rPr>
+              <a:t>ρ · θ · o</a:t>
+            </a:r>
+          </a:p>
+        </p:txBody>
+      </p:sp>
+      <p:sp>
+        <p:nvSpPr>
+          <p:cNvPr id="15" name="Rounded Rectangle 14"/>
+          <p:cNvSpPr/>
+          <p:nvPr/>
+        </p:nvSpPr>
+        <p:spPr>
+          <a:xfrm>
+            <a:off x="2766600" y="4031999"/>
+            <a:ext cx="1980000" cy="827999"/>
+          </a:xfrm>
+          <a:prstGeom prst="roundRect">
+            <a:avLst>
+              <a:gd name="adj" fmla="val 9000"/>
+            </a:avLst>
+          </a:prstGeom>
+          <a:solidFill>
+            <a:srgbClr val="FFFFFF"/>
+          </a:solidFill>
+          <a:ln w="25400">
+            <a:solidFill>
+              <a:srgbClr val="1A1A1A"/>
+            </a:solidFill>
+          </a:ln>
+          <a:effectLst/>
+        </p:spPr>
+        <p:style>
+          <a:lnRef idx="1">
+            <a:schemeClr val="accent1"/>
+          </a:lnRef>
+          <a:fillRef idx="3">
+            <a:schemeClr val="accent1"/>
+          </a:fillRef>
+          <a:effectRef idx="2">
+            <a:schemeClr val="accent1"/>
+          </a:effectRef>
+          <a:fontRef idx="minor">
+            <a:schemeClr val="lt1"/>
+          </a:fontRef>
+        </p:style>
+        <p:txBody>
+          <a:bodyPr rtlCol="0" anchor="ctr" wrap="square" lIns="54000" rIns="54000" tIns="36000" bIns="36000"/>
+          <a:lstStyle/>
+          <a:p>
+            <a:pPr algn="ctr"/>
+            <a:r>
+              <a:rPr sz="1150" b="1">
+                <a:solidFill>
+                  <a:srgbClr val="1A1A1A"/>
+                </a:solidFill>
+                <a:latin typeface="맑은 고딕"/>
+              </a:rPr>
+              <a:t>검출확률 곡선</a:t>
+            </a:r>
+          </a:p>
+          <a:p>
+            <a:pPr algn="ctr">
+              <a:spcBef>
+                <a:spcPts val="200"/>
+              </a:spcBef>
+            </a:pPr>
+            <a:r>
+              <a:rPr sz="950">
+                <a:solidFill>
+                  <a:srgbClr val="6E6E6E"/>
+                </a:solidFill>
+                <a:latin typeface="맑은 고딕"/>
+              </a:rPr>
+              <a:t>f(ρ)·g(θ)·h(o)</a:t>
+            </a:r>
+          </a:p>
+        </p:txBody>
+      </p:sp>
+      <p:cxnSp>
+        <p:nvCxnSpPr>
+          <p:cNvPr id="16" name="Connector 15"/>
+          <p:cNvCxnSpPr/>
+          <p:nvPr/>
+        </p:nvCxnSpPr>
+        <p:spPr>
+          <a:xfrm>
+            <a:off x="2406600" y="4445998"/>
+            <a:ext cx="360000" cy="0"/>
+          </a:xfrm>
+          <a:prstGeom prst="line">
+            <a:avLst/>
+          </a:prstGeom>
+          <a:ln w="15240">
+            <a:solidFill>
+              <a:srgbClr val="6E6E6E"/>
+            </a:solidFill>
+            <a:tailEnd type="triangle" w="med" len="med"/>
+          </a:ln>
+        </p:spPr>
+        <p:style>
+          <a:lnRef idx="2">
+            <a:schemeClr val="accent1"/>
+          </a:lnRef>
+          <a:fillRef idx="0">
+            <a:schemeClr val="accent1"/>
+          </a:fillRef>
+          <a:effectRef idx="1">
+            <a:schemeClr val="accent1"/>
+          </a:effectRef>
+          <a:fontRef idx="minor">
+            <a:schemeClr val="tx1"/>
+          </a:fontRef>
+        </p:style>
+      </p:cxnSp>
+      <p:sp>
+        <p:nvSpPr>
+          <p:cNvPr id="17" name="Rounded Rectangle 16"/>
+          <p:cNvSpPr/>
+          <p:nvPr/>
+        </p:nvSpPr>
+        <p:spPr>
+          <a:xfrm>
+            <a:off x="5106600" y="4031999"/>
+            <a:ext cx="1980000" cy="827999"/>
+          </a:xfrm>
+          <a:prstGeom prst="roundRect">
+            <a:avLst>
+              <a:gd name="adj" fmla="val 9000"/>
+            </a:avLst>
+          </a:prstGeom>
+          <a:solidFill>
+            <a:srgbClr val="FFFFFF"/>
+          </a:solidFill>
+          <a:ln w="12700">
+            <a:solidFill>
+              <a:srgbClr val="C9C9C9"/>
+            </a:solidFill>
+          </a:ln>
+          <a:effectLst/>
+        </p:spPr>
+        <p:style>
+          <a:lnRef idx="1">
+            <a:schemeClr val="accent1"/>
+          </a:lnRef>
+          <a:fillRef idx="3">
+            <a:schemeClr val="accent1"/>
+          </a:fillRef>
+          <a:effectRef idx="2">
+            <a:schemeClr val="accent1"/>
+          </a:effectRef>
+          <a:fontRef idx="minor">
+            <a:schemeClr val="lt1"/>
+          </a:fontRef>
+        </p:style>
+        <p:txBody>
+          <a:bodyPr rtlCol="0" anchor="ctr" wrap="square" lIns="54000" rIns="54000" tIns="36000" bIns="36000"/>
+          <a:lstStyle/>
+          <a:p>
+            <a:pPr algn="ctr"/>
+            <a:r>
+              <a:rPr sz="1150" b="1">
+                <a:solidFill>
+                  <a:srgbClr val="1A1A1A"/>
+                </a:solidFill>
+                <a:latin typeface="맑은 고딕"/>
+              </a:rPr>
+              <a:t>다중 카메라 결합</a:t>
+            </a:r>
+          </a:p>
+          <a:p>
+            <a:pPr algn="ctr">
+              <a:spcBef>
+                <a:spcPts val="200"/>
+              </a:spcBef>
+            </a:pPr>
+            <a:r>
+              <a:rPr sz="950">
+                <a:solidFill>
+                  <a:srgbClr val="6E6E6E"/>
+                </a:solidFill>
+                <a:latin typeface="맑은 고딕"/>
+              </a:rPr>
+              <a:t>1 - Π(1-P)</a:t>
+            </a:r>
+          </a:p>
+        </p:txBody>
+      </p:sp>
+      <p:cxnSp>
+        <p:nvCxnSpPr>
+          <p:cNvPr id="18" name="Connector 17"/>
+          <p:cNvCxnSpPr/>
+          <p:nvPr/>
+        </p:nvCxnSpPr>
+        <p:spPr>
+          <a:xfrm>
+            <a:off x="4746600" y="4445998"/>
+            <a:ext cx="360000" cy="0"/>
+          </a:xfrm>
+          <a:prstGeom prst="line">
+            <a:avLst/>
+          </a:prstGeom>
+          <a:ln w="15240">
+            <a:solidFill>
+              <a:srgbClr val="6E6E6E"/>
+            </a:solidFill>
+            <a:tailEnd type="triangle" w="med" len="med"/>
+          </a:ln>
+        </p:spPr>
+        <p:style>
+          <a:lnRef idx="2">
+            <a:schemeClr val="accent1"/>
+          </a:lnRef>
+          <a:fillRef idx="0">
+            <a:schemeClr val="accent1"/>
+          </a:fillRef>
+          <a:effectRef idx="1">
+            <a:schemeClr val="accent1"/>
+          </a:effectRef>
+          <a:fontRef idx="minor">
+            <a:schemeClr val="tx1"/>
+          </a:fontRef>
+        </p:style>
+      </p:cxnSp>
+      <p:sp>
+        <p:nvSpPr>
+          <p:cNvPr id="19" name="Rounded Rectangle 18"/>
+          <p:cNvSpPr/>
+          <p:nvPr/>
+        </p:nvSpPr>
+        <p:spPr>
+          <a:xfrm>
+            <a:off x="7446600" y="4031999"/>
+            <a:ext cx="1980000" cy="827999"/>
+          </a:xfrm>
+          <a:prstGeom prst="roundRect">
+            <a:avLst>
+              <a:gd name="adj" fmla="val 9000"/>
+            </a:avLst>
+          </a:prstGeom>
+          <a:solidFill>
+            <a:srgbClr val="FFFFFF"/>
+          </a:solidFill>
+          <a:ln w="25400">
+            <a:solidFill>
+              <a:srgbClr val="1A1A1A"/>
+            </a:solidFill>
+          </a:ln>
+          <a:effectLst/>
+        </p:spPr>
+        <p:style>
+          <a:lnRef idx="1">
+            <a:schemeClr val="accent1"/>
+          </a:lnRef>
+          <a:fillRef idx="3">
+            <a:schemeClr val="accent1"/>
+          </a:fillRef>
+          <a:effectRef idx="2">
+            <a:schemeClr val="accent1"/>
+          </a:effectRef>
+          <a:fontRef idx="minor">
+            <a:schemeClr val="lt1"/>
+          </a:fontRef>
+        </p:style>
+        <p:txBody>
+          <a:bodyPr rtlCol="0" anchor="ctr" wrap="square" lIns="54000" rIns="54000" tIns="36000" bIns="36000"/>
+          <a:lstStyle/>
+          <a:p>
+            <a:pPr algn="ctr"/>
+            <a:r>
+              <a:rPr sz="1150" b="1">
+                <a:solidFill>
+                  <a:srgbClr val="1A1A1A"/>
+                </a:solidFill>
+                <a:latin typeface="맑은 고딕"/>
+              </a:rPr>
+              <a:t>100점 채점</a:t>
+            </a:r>
+          </a:p>
+          <a:p>
+            <a:pPr algn="ctr">
+              <a:spcBef>
+                <a:spcPts val="200"/>
+              </a:spcBef>
+            </a:pPr>
+            <a:r>
+              <a:rPr sz="950">
+                <a:solidFill>
+                  <a:srgbClr val="6E6E6E"/>
+                </a:solidFill>
+                <a:latin typeface="맑은 고딕"/>
+              </a:rPr>
+              <a:t>배점 × 달성률</a:t>
+            </a:r>
+          </a:p>
+        </p:txBody>
+      </p:sp>
+      <p:cxnSp>
+        <p:nvCxnSpPr>
+          <p:cNvPr id="20" name="Connector 19"/>
+          <p:cNvCxnSpPr/>
+          <p:nvPr/>
+        </p:nvCxnSpPr>
+        <p:spPr>
+          <a:xfrm>
+            <a:off x="7086600" y="4445998"/>
+            <a:ext cx="360000" cy="0"/>
+          </a:xfrm>
+          <a:prstGeom prst="line">
+            <a:avLst/>
+          </a:prstGeom>
+          <a:ln w="15240">
+            <a:solidFill>
+              <a:srgbClr val="6E6E6E"/>
+            </a:solidFill>
+            <a:tailEnd type="triangle" w="med" len="med"/>
+          </a:ln>
+        </p:spPr>
+        <p:style>
+          <a:lnRef idx="2">
+            <a:schemeClr val="accent1"/>
+          </a:lnRef>
+          <a:fillRef idx="0">
+            <a:schemeClr val="accent1"/>
+          </a:fillRef>
+          <a:effectRef idx="1">
+            <a:schemeClr val="accent1"/>
+          </a:effectRef>
+          <a:fontRef idx="minor">
+            <a:schemeClr val="tx1"/>
+          </a:fontRef>
+        </p:style>
+      </p:cxnSp>
+      <p:sp>
+        <p:nvSpPr>
+          <p:cNvPr id="21" name="Rounded Rectangle 20"/>
+          <p:cNvSpPr/>
+          <p:nvPr/>
+        </p:nvSpPr>
+        <p:spPr>
+          <a:xfrm>
+            <a:off x="9786600" y="4031999"/>
+            <a:ext cx="1980000" cy="827999"/>
+          </a:xfrm>
+          <a:prstGeom prst="roundRect">
+            <a:avLst>
+              <a:gd name="adj" fmla="val 9000"/>
+            </a:avLst>
+          </a:prstGeom>
+          <a:solidFill>
+            <a:srgbClr val="FFFFFF"/>
+          </a:solidFill>
+          <a:ln w="12700">
+            <a:solidFill>
+              <a:srgbClr val="C9C9C9"/>
+            </a:solidFill>
+          </a:ln>
+          <a:effectLst/>
+        </p:spPr>
+        <p:style>
+          <a:lnRef idx="1">
+            <a:schemeClr val="accent1"/>
+          </a:lnRef>
+          <a:fillRef idx="3">
+            <a:schemeClr val="accent1"/>
+          </a:fillRef>
+          <a:effectRef idx="2">
+            <a:schemeClr val="accent1"/>
+          </a:effectRef>
+          <a:fontRef idx="minor">
+            <a:schemeClr val="lt1"/>
+          </a:fontRef>
+        </p:style>
+        <p:txBody>
+          <a:bodyPr rtlCol="0" anchor="ctr" wrap="square" lIns="54000" rIns="54000" tIns="36000" bIns="36000"/>
+          <a:lstStyle/>
+          <a:p>
+            <a:pPr algn="ctr"/>
+            <a:r>
+              <a:rPr sz="1150" b="1">
+                <a:solidFill>
+                  <a:srgbClr val="1A1A1A"/>
+                </a:solidFill>
+                <a:latin typeface="맑은 고딕"/>
+              </a:rPr>
+              <a:t>처방</a:t>
+            </a:r>
+          </a:p>
+          <a:p>
+            <a:pPr algn="ctr">
+              <a:spcBef>
+                <a:spcPts val="200"/>
+              </a:spcBef>
+            </a:pPr>
+            <a:r>
+              <a:rPr sz="950">
+                <a:solidFill>
+                  <a:srgbClr val="6E6E6E"/>
+                </a:solidFill>
+                <a:latin typeface="맑은 고딕"/>
+              </a:rPr>
+              <a:t>재배치 → 증설</a:t>
+            </a:r>
+          </a:p>
+        </p:txBody>
+      </p:sp>
+      <p:cxnSp>
+        <p:nvCxnSpPr>
+          <p:cNvPr id="22" name="Connector 21"/>
+          <p:cNvCxnSpPr/>
+          <p:nvPr/>
+        </p:nvCxnSpPr>
+        <p:spPr>
+          <a:xfrm>
+            <a:off x="9426600" y="4445998"/>
+            <a:ext cx="360000" cy="0"/>
+          </a:xfrm>
+          <a:prstGeom prst="line">
+            <a:avLst/>
+          </a:prstGeom>
+          <a:ln w="15240">
+            <a:solidFill>
+              <a:srgbClr val="6E6E6E"/>
+            </a:solidFill>
+            <a:tailEnd type="triangle" w="med" len="med"/>
+          </a:ln>
+        </p:spPr>
+        <p:style>
+          <a:lnRef idx="2">
+            <a:schemeClr val="accent1"/>
+          </a:lnRef>
+          <a:fillRef idx="0">
+            <a:schemeClr val="accent1"/>
+          </a:fillRef>
+          <a:effectRef idx="1">
+            <a:schemeClr val="accent1"/>
+          </a:effectRef>
+          <a:fontRef idx="minor">
+            <a:schemeClr val="tx1"/>
+          </a:fontRef>
+        </p:style>
+      </p:cxnSp>
+      <p:cxnSp>
+        <p:nvCxnSpPr>
+          <p:cNvPr id="23" name="Connector 22"/>
+          <p:cNvCxnSpPr/>
+          <p:nvPr/>
+        </p:nvCxnSpPr>
+        <p:spPr>
+          <a:xfrm>
+            <a:off x="1416600" y="2538000"/>
+            <a:ext cx="0" cy="1493999"/>
+          </a:xfrm>
+          <a:prstGeom prst="line">
+            <a:avLst/>
+          </a:prstGeom>
+          <a:ln w="15240">
+            <a:solidFill>
+              <a:srgbClr val="6E6E6E"/>
+            </a:solidFill>
+            <a:tailEnd type="triangle" w="med" len="med"/>
+          </a:ln>
+        </p:spPr>
+        <p:style>
+          <a:lnRef idx="2">
+            <a:schemeClr val="accent1"/>
+          </a:lnRef>
+          <a:fillRef idx="0">
+            <a:schemeClr val="accent1"/>
+          </a:fillRef>
+          <a:effectRef idx="1">
+            <a:schemeClr val="accent1"/>
+          </a:effectRef>
+          <a:fontRef idx="minor">
+            <a:schemeClr val="tx1"/>
+          </a:fontRef>
+        </p:style>
+      </p:cxnSp>
+      <p:sp>
+        <p:nvSpPr>
+          <p:cNvPr id="24" name="TextBox 23"/>
           <p:cNvSpPr txBox="1"/>
           <p:nvPr/>
         </p:nvSpPr>
         <p:spPr>
           <a:xfrm>
-            <a:off x="576000" y="6300000"/>
+            <a:off x="576000" y="5256000"/>
             <a:ext cx="11016000" cy="432000"/>
           </a:xfrm>
           <a:prstGeom prst="rect">
@@ -5031,13 +5949,91 @@
               </a:spcAft>
             </a:pPr>
             <a:r>
+              <a:rPr sz="1300" b="1">
+                <a:solidFill>
+                  <a:srgbClr val="1A1A1A"/>
+                </a:solidFill>
+                <a:latin typeface="맑은 고딕"/>
+              </a:rPr>
+              <a:t>그림 4. 처리 흐름. 입력은 네 개의 계약 파일이며 실제 도면·계획서를 그 형식으로 넣으면 그대로 돈다.</a:t>
+            </a:r>
+          </a:p>
+        </p:txBody>
+      </p:sp>
+      <p:sp>
+        <p:nvSpPr>
+          <p:cNvPr id="25" name="TextBox 24"/>
+          <p:cNvSpPr txBox="1"/>
+          <p:nvPr/>
+        </p:nvSpPr>
+        <p:spPr>
+          <a:xfrm>
+            <a:off x="576000" y="5688000"/>
+            <a:ext cx="11016000" cy="576000"/>
+          </a:xfrm>
+          <a:prstGeom prst="rect">
+            <a:avLst/>
+          </a:prstGeom>
+          <a:noFill/>
+        </p:spPr>
+        <p:txBody>
+          <a:bodyPr wrap="square">
+            <a:spAutoFit/>
+          </a:bodyPr>
+          <a:lstStyle/>
+          <a:p>
+            <a:pPr algn="l">
+              <a:spcAft>
+                <a:spcPts val="600"/>
+              </a:spcAft>
+            </a:pPr>
+            <a:r>
+              <a:rPr sz="1100" b="0">
+                <a:solidFill>
+                  <a:srgbClr val="6E6E6E"/>
+                </a:solidFill>
+                <a:latin typeface="맑은 고딕"/>
+              </a:rPr>
+              <a:t>굵은 테두리 상자 둘이 이 연구의 몫이다. 나머지는 기존 기법을 조합한 것이고, 새로운 것은 검출확률을 실측해 연속값으로 다루는 것과 그 위에서 위험가중으로 채점한다는 점이다.</a:t>
+            </a:r>
+          </a:p>
+        </p:txBody>
+      </p:sp>
+      <p:sp>
+        <p:nvSpPr>
+          <p:cNvPr id="26" name="TextBox 25"/>
+          <p:cNvSpPr txBox="1"/>
+          <p:nvPr/>
+        </p:nvSpPr>
+        <p:spPr>
+          <a:xfrm>
+            <a:off x="576000" y="6228000"/>
+            <a:ext cx="11016000" cy="360000"/>
+          </a:xfrm>
+          <a:prstGeom prst="rect">
+            <a:avLst/>
+          </a:prstGeom>
+          <a:noFill/>
+        </p:spPr>
+        <p:txBody>
+          <a:bodyPr wrap="square">
+            <a:spAutoFit/>
+          </a:bodyPr>
+          <a:lstStyle/>
+          <a:p>
+            <a:pPr algn="l">
+              <a:spcAft>
+                <a:spcPts val="600"/>
+              </a:spcAft>
+            </a:pPr>
+            <a:r>
               <a:rPr sz="1000" b="0">
                 <a:solidFill>
-                  <a:srgbClr val="A33B29"/>
-                </a:solidFill>
-                <a:latin typeface="맑은 고딕"/>
-              </a:rPr>
-              <a:t>★ 필수</a:t>
+                  <a:srgbClr val="1A1A1A"/>
+                </a:solidFill>
+                <a:latin typeface="맑은 고딕"/>
+              </a:rPr>
+              <a:t>★ 필수 · 도형이라 PPT 에서 바로 수정된다. 그림 파일 판은 outputs/figures/fig_pipeline.png</a:t>
             </a:r>
           </a:p>
         </p:txBody>
@@ -5098,7 +6094,7 @@
             <a:r>
               <a:rPr sz="1300" b="1">
                 <a:solidFill>
-                  <a:srgbClr val="A33B29"/>
+                  <a:srgbClr val="1A1A1A"/>
                 </a:solidFill>
                 <a:latin typeface="맑은 고딕"/>
               </a:rPr>
@@ -5137,7 +6133,7 @@
             <a:r>
               <a:rPr sz="2200" b="1">
                 <a:solidFill>
-                  <a:srgbClr val="1C1A17"/>
+                  <a:srgbClr val="1A1A1A"/>
                 </a:solidFill>
                 <a:latin typeface="맑은 고딕"/>
               </a:rPr>
@@ -5176,7 +6172,7 @@
             <a:r>
               <a:rPr sz="1200" b="1">
                 <a:solidFill>
-                  <a:srgbClr val="77726A"/>
+                  <a:srgbClr val="6E6E6E"/>
                 </a:solidFill>
                 <a:latin typeface="맑은 고딕"/>
               </a:rPr>
@@ -5239,7 +6235,7 @@
             <a:r>
               <a:rPr sz="1300" b="1">
                 <a:solidFill>
-                  <a:srgbClr val="1C1A17"/>
+                  <a:srgbClr val="1A1A1A"/>
                 </a:solidFill>
                 <a:latin typeface="맑은 고딕"/>
               </a:rPr>
@@ -5278,7 +6274,7 @@
             <a:r>
               <a:rPr sz="1100" b="0">
                 <a:solidFill>
-                  <a:srgbClr val="77726A"/>
+                  <a:srgbClr val="6E6E6E"/>
                 </a:solidFill>
                 <a:latin typeface="맑은 고딕"/>
               </a:rPr>
@@ -5317,7 +6313,7 @@
             <a:r>
               <a:rPr sz="1000" b="0">
                 <a:solidFill>
-                  <a:srgbClr val="A33B29"/>
+                  <a:srgbClr val="1A1A1A"/>
                 </a:solidFill>
                 <a:latin typeface="맑은 고딕"/>
               </a:rPr>
@@ -5382,7 +6378,7 @@
             <a:r>
               <a:rPr sz="1300" b="1">
                 <a:solidFill>
-                  <a:srgbClr val="A33B29"/>
+                  <a:srgbClr val="1A1A1A"/>
                 </a:solidFill>
                 <a:latin typeface="맑은 고딕"/>
               </a:rPr>
@@ -5421,7 +6417,7 @@
             <a:r>
               <a:rPr sz="2200" b="1">
                 <a:solidFill>
-                  <a:srgbClr val="1C1A17"/>
+                  <a:srgbClr val="1A1A1A"/>
                 </a:solidFill>
                 <a:latin typeface="맑은 고딕"/>
               </a:rPr>
@@ -5460,7 +6456,7 @@
             <a:r>
               <a:rPr sz="1200" b="1">
                 <a:solidFill>
-                  <a:srgbClr val="77726A"/>
+                  <a:srgbClr val="6E6E6E"/>
                 </a:solidFill>
                 <a:latin typeface="맑은 고딕"/>
               </a:rPr>
@@ -5523,7 +6519,7 @@
             <a:r>
               <a:rPr sz="1300" b="1">
                 <a:solidFill>
-                  <a:srgbClr val="1C1A17"/>
+                  <a:srgbClr val="1A1A1A"/>
                 </a:solidFill>
                 <a:latin typeface="맑은 고딕"/>
               </a:rPr>
@@ -5562,7 +6558,7 @@
             <a:r>
               <a:rPr sz="1100" b="0">
                 <a:solidFill>
-                  <a:srgbClr val="77726A"/>
+                  <a:srgbClr val="6E6E6E"/>
                 </a:solidFill>
                 <a:latin typeface="맑은 고딕"/>
               </a:rPr>
@@ -5601,7 +6597,7 @@
             <a:r>
               <a:rPr sz="1000" b="0">
                 <a:solidFill>
-                  <a:srgbClr val="A33B29"/>
+                  <a:srgbClr val="1A1A1A"/>
                 </a:solidFill>
                 <a:latin typeface="맑은 고딕"/>
               </a:rPr>
@@ -5666,7 +6662,7 @@
             <a:r>
               <a:rPr sz="1300" b="1">
                 <a:solidFill>
-                  <a:srgbClr val="A33B29"/>
+                  <a:srgbClr val="1A1A1A"/>
                 </a:solidFill>
                 <a:latin typeface="맑은 고딕"/>
               </a:rPr>
@@ -5705,7 +6701,7 @@
             <a:r>
               <a:rPr sz="2200" b="1">
                 <a:solidFill>
-                  <a:srgbClr val="1C1A17"/>
+                  <a:srgbClr val="1A1A1A"/>
                 </a:solidFill>
                 <a:latin typeface="맑은 고딕"/>
               </a:rPr>
@@ -5744,7 +6740,7 @@
             <a:r>
               <a:rPr sz="1200" b="1">
                 <a:solidFill>
-                  <a:srgbClr val="77726A"/>
+                  <a:srgbClr val="6E6E6E"/>
                 </a:solidFill>
                 <a:latin typeface="맑은 고딕"/>
               </a:rPr>
@@ -5807,7 +6803,7 @@
             <a:r>
               <a:rPr sz="1300" b="1">
                 <a:solidFill>
-                  <a:srgbClr val="1C1A17"/>
+                  <a:srgbClr val="1A1A1A"/>
                 </a:solidFill>
                 <a:latin typeface="맑은 고딕"/>
               </a:rPr>
@@ -5846,7 +6842,7 @@
             <a:r>
               <a:rPr sz="1100" b="0">
                 <a:solidFill>
-                  <a:srgbClr val="77726A"/>
+                  <a:srgbClr val="6E6E6E"/>
                 </a:solidFill>
                 <a:latin typeface="맑은 고딕"/>
               </a:rPr>
@@ -5885,7 +6881,7 @@
             <a:r>
               <a:rPr sz="1000" b="0">
                 <a:solidFill>
-                  <a:srgbClr val="A33B29"/>
+                  <a:srgbClr val="1A1A1A"/>
                 </a:solidFill>
                 <a:latin typeface="맑은 고딕"/>
               </a:rPr>
@@ -5950,7 +6946,7 @@
             <a:r>
               <a:rPr sz="1300" b="1">
                 <a:solidFill>
-                  <a:srgbClr val="A33B29"/>
+                  <a:srgbClr val="1A1A1A"/>
                 </a:solidFill>
                 <a:latin typeface="맑은 고딕"/>
               </a:rPr>
@@ -5989,7 +6985,7 @@
             <a:r>
               <a:rPr sz="2200" b="1">
                 <a:solidFill>
-                  <a:srgbClr val="1C1A17"/>
+                  <a:srgbClr val="1A1A1A"/>
                 </a:solidFill>
                 <a:latin typeface="맑은 고딕"/>
               </a:rPr>
@@ -6028,7 +7024,7 @@
             <a:r>
               <a:rPr sz="1200" b="1">
                 <a:solidFill>
-                  <a:srgbClr val="77726A"/>
+                  <a:srgbClr val="6E6E6E"/>
                 </a:solidFill>
                 <a:latin typeface="맑은 고딕"/>
               </a:rPr>
@@ -6091,7 +7087,7 @@
             <a:r>
               <a:rPr sz="1300" b="1">
                 <a:solidFill>
-                  <a:srgbClr val="1C1A17"/>
+                  <a:srgbClr val="1A1A1A"/>
                 </a:solidFill>
                 <a:latin typeface="맑은 고딕"/>
               </a:rPr>
@@ -6130,7 +7126,7 @@
             <a:r>
               <a:rPr sz="1100" b="0">
                 <a:solidFill>
-                  <a:srgbClr val="77726A"/>
+                  <a:srgbClr val="6E6E6E"/>
                 </a:solidFill>
                 <a:latin typeface="맑은 고딕"/>
               </a:rPr>
@@ -6169,7 +7165,7 @@
             <a:r>
               <a:rPr sz="1000" b="0">
                 <a:solidFill>
-                  <a:srgbClr val="A33B29"/>
+                  <a:srgbClr val="1A1A1A"/>
                 </a:solidFill>
                 <a:latin typeface="맑은 고딕"/>
               </a:rPr>

--- a/outputs/BIGB_그림_0823.pptx
+++ b/outputs/BIGB_그림_0823.pptx
@@ -5345,7 +5345,7 @@
         </p:nvSpPr>
         <p:spPr>
           <a:xfrm>
-            <a:off x="588600" y="2574000"/>
+            <a:off x="8004600" y="2592000"/>
             <a:ext cx="3600000" cy="288000"/>
           </a:xfrm>
           <a:prstGeom prst="rect">
@@ -5359,7 +5359,7 @@
           </a:bodyPr>
           <a:lstStyle/>
           <a:p>
-            <a:pPr algn="l">
+            <a:pPr algn="r">
               <a:spcAft>
                 <a:spcPts val="600"/>
               </a:spcAft>
@@ -5929,8 +5929,8 @@
         </p:nvSpPr>
         <p:spPr>
           <a:xfrm>
-            <a:off x="576000" y="5256000"/>
-            <a:ext cx="11016000" cy="432000"/>
+            <a:off x="426600" y="5004000"/>
+            <a:ext cx="10080000" cy="324000"/>
           </a:xfrm>
           <a:prstGeom prst="rect">
             <a:avLst/>
@@ -5949,13 +5949,13 @@
               </a:spcAft>
             </a:pPr>
             <a:r>
-              <a:rPr sz="1300" b="1">
+              <a:rPr sz="1050" b="0">
                 <a:solidFill>
                   <a:srgbClr val="1A1A1A"/>
                 </a:solidFill>
                 <a:latin typeface="맑은 고딕"/>
               </a:rPr>
-              <a:t>그림 4. 처리 흐름. 입력은 네 개의 계약 파일이며 실제 도면·계획서를 그 형식으로 넣으면 그대로 돈다.</a:t>
+              <a:t>ρ 화면 속 머리 크기(픽셀)   ·   θ 내려다보는 각도   ·   o 가려진 정도   ·   P 검출확률</a:t>
             </a:r>
           </a:p>
         </p:txBody>
@@ -5968,8 +5968,8 @@
         </p:nvSpPr>
         <p:spPr>
           <a:xfrm>
-            <a:off x="576000" y="5688000"/>
-            <a:ext cx="11016000" cy="576000"/>
+            <a:off x="576000" y="5400000"/>
+            <a:ext cx="11016000" cy="432000"/>
           </a:xfrm>
           <a:prstGeom prst="rect">
             <a:avLst/>
@@ -5988,13 +5988,13 @@
               </a:spcAft>
             </a:pPr>
             <a:r>
-              <a:rPr sz="1100" b="0">
-                <a:solidFill>
-                  <a:srgbClr val="6E6E6E"/>
-                </a:solidFill>
-                <a:latin typeface="맑은 고딕"/>
-              </a:rPr>
-              <a:t>굵은 테두리 상자 둘이 이 연구의 몫이다. 나머지는 기존 기법을 조합한 것이고, 새로운 것은 검출확률을 실측해 연속값으로 다루는 것과 그 위에서 위험가중으로 채점한다는 점이다.</a:t>
+              <a:rPr sz="1300" b="1">
+                <a:solidFill>
+                  <a:srgbClr val="1A1A1A"/>
+                </a:solidFill>
+                <a:latin typeface="맑은 고딕"/>
+              </a:rPr>
+              <a:t>그림 4. 처리 흐름. 입력은 네 개의 계약 파일이며 실제 도면·계획서를 그 형식으로 넣으면 그대로 돈다.</a:t>
             </a:r>
           </a:p>
         </p:txBody>
@@ -6007,7 +6007,46 @@
         </p:nvSpPr>
         <p:spPr>
           <a:xfrm>
-            <a:off x="576000" y="6228000"/>
+            <a:off x="576000" y="5796000"/>
+            <a:ext cx="11016000" cy="576000"/>
+          </a:xfrm>
+          <a:prstGeom prst="rect">
+            <a:avLst/>
+          </a:prstGeom>
+          <a:noFill/>
+        </p:spPr>
+        <p:txBody>
+          <a:bodyPr wrap="square">
+            <a:spAutoFit/>
+          </a:bodyPr>
+          <a:lstStyle/>
+          <a:p>
+            <a:pPr algn="l">
+              <a:spcAft>
+                <a:spcPts val="600"/>
+              </a:spcAft>
+            </a:pPr>
+            <a:r>
+              <a:rPr sz="1100" b="0">
+                <a:solidFill>
+                  <a:srgbClr val="6E6E6E"/>
+                </a:solidFill>
+                <a:latin typeface="맑은 고딕"/>
+              </a:rPr>
+              <a:t>굵은 테두리 상자 둘이 이 연구의 몫이다. 나머지는 기존 기법을 조합한 것이고, 새로운 것은 검출확률을 실측해 연속값으로 다루는 것과 그 위에서 위험가중으로 채점한다는 점이다.</a:t>
+            </a:r>
+          </a:p>
+        </p:txBody>
+      </p:sp>
+      <p:sp>
+        <p:nvSpPr>
+          <p:cNvPr id="27" name="TextBox 26"/>
+          <p:cNvSpPr txBox="1"/>
+          <p:nvPr/>
+        </p:nvSpPr>
+        <p:spPr>
+          <a:xfrm>
+            <a:off x="576000" y="6336000"/>
             <a:ext cx="11016000" cy="360000"/>
           </a:xfrm>
           <a:prstGeom prst="rect">
@@ -7035,7 +7074,7 @@
       </p:sp>
       <p:pic>
         <p:nvPicPr>
-          <p:cNvPr id="5" name="Picture 4" descr="safety-report.png"/>
+          <p:cNvPr id="5" name="Picture 4" descr="fig_report.png"/>
           <p:cNvPicPr>
             <a:picLocks noChangeAspect="1"/>
           </p:cNvPicPr>
@@ -7049,8 +7088,8 @@
         </p:blipFill>
         <p:spPr>
           <a:xfrm>
-            <a:off x="5507384" y="1260000"/>
-            <a:ext cx="1178431" cy="4104000"/>
+            <a:off x="3529724" y="1260000"/>
+            <a:ext cx="5133752" cy="4104000"/>
           </a:xfrm>
           <a:prstGeom prst="rect">
             <a:avLst/>
@@ -7091,7 +7130,7 @@
                 </a:solidFill>
                 <a:latin typeface="맑은 고딕"/>
               </a:rPr>
-              <a:t>그림 8. 자동 생성되는 A4 보고서. 시행규칙 별표 7 의 CCTV 설치·운용계획 칸을 채운다.</a:t>
+              <a:t>그림 8. 자동 생성되는 안전보고서. 건설기술진흥법 시행규칙 별표 7 의 CCTV 설치·운용계획 칸을 채운다.</a:t>
             </a:r>
           </a:p>
         </p:txBody>
@@ -7130,7 +7169,7 @@
                 </a:solidFill>
                 <a:latin typeface="맑은 고딕"/>
               </a:rPr>
-              <a:t>"이대로 제출된다"를 보이는 그림. 법정 서류에 자리가 있다는 §1 논거와 짝을 이룬다.</a:t>
+              <a:t>A4 한 장을 그대로 넣으면 1:2.9 로 길쭉해 글씨가 안 읽힌다. 세로로 반을 갈라 좌우로 놓아 1:0.7 로 만들었다. 긴 표는 앞부분만 남겼다.</a:t>
             </a:r>
           </a:p>
         </p:txBody>
@@ -7169,7 +7208,7 @@
                 </a:solidFill>
                 <a:latin typeface="맑은 고딕"/>
               </a:rPr>
-              <a:t>선택</a:t>
+              <a:t>★ 필수로 올림 · 법정 서류에 자리가 있다는 §1 논거와 짝을 이룬다</a:t>
             </a:r>
           </a:p>
         </p:txBody>
